--- a/docs/presentaciones/classes/clase-101-regresion-y-clasificacion-con-mlp-presentacion.pptx
+++ b/docs/presentaciones/classes/clase-101-regresion-y-clasificacion-con-mlp-presentacion.pptx
@@ -4910,7 +4910,387 @@
                 </a:solidFill>
                 <a:latin typeface="Courier New"/>
               </a:rPr>
-              <a:t># Imports y configuración inicial</a:t>
+              <a:t>import numpy as np</a:t>
+            </a:r>
+          </a:p>
+          <a:p>
+            <a:pPr>
+              <a:defRPr sz="1200" b="0">
+                <a:solidFill>
+                  <a:srgbClr val="F8FAFC"/>
+                </a:solidFill>
+                <a:latin typeface="Courier New"/>
+              </a:defRPr>
+            </a:pPr>
+            <a:r>
+              <a:rPr sz="1200" b="0">
+                <a:solidFill>
+                  <a:srgbClr val="F8FAFC"/>
+                </a:solidFill>
+                <a:latin typeface="Courier New"/>
+              </a:rPr>
+              <a:t>import tensorflow as tf</a:t>
+            </a:r>
+          </a:p>
+          <a:p>
+            <a:pPr>
+              <a:defRPr sz="1200" b="0">
+                <a:solidFill>
+                  <a:srgbClr val="F8FAFC"/>
+                </a:solidFill>
+                <a:latin typeface="Courier New"/>
+              </a:defRPr>
+            </a:pPr>
+            <a:r>
+              <a:rPr sz="1200" b="0">
+                <a:solidFill>
+                  <a:srgbClr val="F8FAFC"/>
+                </a:solidFill>
+                <a:latin typeface="Courier New"/>
+              </a:rPr>
+              <a:t>from tensorflow import keras</a:t>
+            </a:r>
+          </a:p>
+          <a:p>
+            <a:pPr>
+              <a:defRPr sz="1200" b="0">
+                <a:solidFill>
+                  <a:srgbClr val="F8FAFC"/>
+                </a:solidFill>
+                <a:latin typeface="Courier New"/>
+              </a:defRPr>
+            </a:pPr>
+            <a:r>
+              <a:rPr sz="1200" b="0">
+                <a:solidFill>
+                  <a:srgbClr val="F8FAFC"/>
+                </a:solidFill>
+                <a:latin typeface="Courier New"/>
+              </a:rPr>
+              <a:t>from tensorflow.keras import layers</a:t>
+            </a:r>
+          </a:p>
+          <a:p>
+            <a:pPr>
+              <a:defRPr sz="1200" b="0">
+                <a:solidFill>
+                  <a:srgbClr val="F8FAFC"/>
+                </a:solidFill>
+                <a:latin typeface="Courier New"/>
+              </a:defRPr>
+            </a:pPr>
+            <a:r>
+              <a:rPr sz="1200" b="0">
+                <a:solidFill>
+                  <a:srgbClr val="F8FAFC"/>
+                </a:solidFill>
+                <a:latin typeface="Courier New"/>
+              </a:rPr>
+              <a:t>from sklearn.datasets import fetch_california_housing</a:t>
+            </a:r>
+          </a:p>
+          <a:p>
+            <a:pPr>
+              <a:defRPr sz="1200" b="0">
+                <a:solidFill>
+                  <a:srgbClr val="F8FAFC"/>
+                </a:solidFill>
+                <a:latin typeface="Courier New"/>
+              </a:defRPr>
+            </a:pPr>
+            <a:r>
+              <a:rPr sz="1200" b="0">
+                <a:solidFill>
+                  <a:srgbClr val="F8FAFC"/>
+                </a:solidFill>
+                <a:latin typeface="Courier New"/>
+              </a:rPr>
+              <a:t>from sklearn.model_selection import train_test_split</a:t>
+            </a:r>
+          </a:p>
+          <a:p>
+            <a:pPr>
+              <a:defRPr sz="1200" b="0">
+                <a:solidFill>
+                  <a:srgbClr val="F8FAFC"/>
+                </a:solidFill>
+                <a:latin typeface="Courier New"/>
+              </a:defRPr>
+            </a:pPr>
+            <a:r>
+              <a:rPr sz="1200" b="0">
+                <a:solidFill>
+                  <a:srgbClr val="F8FAFC"/>
+                </a:solidFill>
+                <a:latin typeface="Courier New"/>
+              </a:rPr>
+              <a:t> </a:t>
+            </a:r>
+          </a:p>
+          <a:p>
+            <a:pPr>
+              <a:defRPr sz="1200" b="0">
+                <a:solidFill>
+                  <a:srgbClr val="F8FAFC"/>
+                </a:solidFill>
+                <a:latin typeface="Courier New"/>
+              </a:defRPr>
+            </a:pPr>
+            <a:r>
+              <a:rPr sz="1200" b="0">
+                <a:solidFill>
+                  <a:srgbClr val="F8FAFC"/>
+                </a:solidFill>
+                <a:latin typeface="Courier New"/>
+              </a:rPr>
+              <a:t>np.random.seed(42); keras.utils.set_random_seed(42)</a:t>
+            </a:r>
+          </a:p>
+          <a:p>
+            <a:pPr>
+              <a:defRPr sz="1200" b="0">
+                <a:solidFill>
+                  <a:srgbClr val="F8FAFC"/>
+                </a:solidFill>
+                <a:latin typeface="Courier New"/>
+              </a:defRPr>
+            </a:pPr>
+            <a:r>
+              <a:rPr sz="1200" b="0">
+                <a:solidFill>
+                  <a:srgbClr val="F8FAFC"/>
+                </a:solidFill>
+                <a:latin typeface="Courier New"/>
+              </a:rPr>
+              <a:t> </a:t>
+            </a:r>
+          </a:p>
+          <a:p>
+            <a:pPr>
+              <a:defRPr sz="1200" b="0">
+                <a:solidFill>
+                  <a:srgbClr val="F8FAFC"/>
+                </a:solidFill>
+                <a:latin typeface="Courier New"/>
+              </a:defRPr>
+            </a:pPr>
+            <a:r>
+              <a:rPr sz="1200" b="0">
+                <a:solidFill>
+                  <a:srgbClr val="F8FAFC"/>
+                </a:solidFill>
+                <a:latin typeface="Courier New"/>
+              </a:rPr>
+              <a:t>X, y = fetch_california_housing(return_X_y=True)</a:t>
+            </a:r>
+          </a:p>
+          <a:p>
+            <a:pPr>
+              <a:defRPr sz="1200" b="0">
+                <a:solidFill>
+                  <a:srgbClr val="F8FAFC"/>
+                </a:solidFill>
+                <a:latin typeface="Courier New"/>
+              </a:defRPr>
+            </a:pPr>
+            <a:r>
+              <a:rPr sz="1200" b="0">
+                <a:solidFill>
+                  <a:srgbClr val="F8FAFC"/>
+                </a:solidFill>
+                <a:latin typeface="Courier New"/>
+              </a:rPr>
+              <a:t>X_tr, X_te, y_tr, y_te = train_test_split(X, y, test_size=0.2, random_state=42)</a:t>
+            </a:r>
+          </a:p>
+          <a:p>
+            <a:pPr>
+              <a:defRPr sz="1200" b="0">
+                <a:solidFill>
+                  <a:srgbClr val="F8FAFC"/>
+                </a:solidFill>
+                <a:latin typeface="Courier New"/>
+              </a:defRPr>
+            </a:pPr>
+            <a:r>
+              <a:rPr sz="1200" b="0">
+                <a:solidFill>
+                  <a:srgbClr val="F8FAFC"/>
+                </a:solidFill>
+                <a:latin typeface="Courier New"/>
+              </a:rPr>
+              <a:t> </a:t>
+            </a:r>
+          </a:p>
+          <a:p>
+            <a:pPr>
+              <a:defRPr sz="1200" b="0">
+                <a:solidFill>
+                  <a:srgbClr val="F8FAFC"/>
+                </a:solidFill>
+                <a:latin typeface="Courier New"/>
+              </a:defRPr>
+            </a:pPr>
+            <a:r>
+              <a:rPr sz="1200" b="0">
+                <a:solidFill>
+                  <a:srgbClr val="F8FAFC"/>
+                </a:solidFill>
+                <a:latin typeface="Courier New"/>
+              </a:rPr>
+              <a:t>norm = layers.Normalization()      # aprende media/desvío de los inputs</a:t>
+            </a:r>
+          </a:p>
+          <a:p>
+            <a:pPr>
+              <a:defRPr sz="1200" b="0">
+                <a:solidFill>
+                  <a:srgbClr val="F8FAFC"/>
+                </a:solidFill>
+                <a:latin typeface="Courier New"/>
+              </a:defRPr>
+            </a:pPr>
+            <a:r>
+              <a:rPr sz="1200" b="0">
+                <a:solidFill>
+                  <a:srgbClr val="F8FAFC"/>
+                </a:solidFill>
+                <a:latin typeface="Courier New"/>
+              </a:rPr>
+              <a:t>norm.adapt(X_tr)</a:t>
+            </a:r>
+          </a:p>
+          <a:p>
+            <a:pPr>
+              <a:defRPr sz="1200" b="0">
+                <a:solidFill>
+                  <a:srgbClr val="F8FAFC"/>
+                </a:solidFill>
+                <a:latin typeface="Courier New"/>
+              </a:defRPr>
+            </a:pPr>
+            <a:r>
+              <a:rPr sz="1200" b="0">
+                <a:solidFill>
+                  <a:srgbClr val="F8FAFC"/>
+                </a:solidFill>
+                <a:latin typeface="Courier New"/>
+              </a:rPr>
+              <a:t> </a:t>
+            </a:r>
+          </a:p>
+          <a:p>
+            <a:pPr>
+              <a:defRPr sz="1200" b="0">
+                <a:solidFill>
+                  <a:srgbClr val="F8FAFC"/>
+                </a:solidFill>
+                <a:latin typeface="Courier New"/>
+              </a:defRPr>
+            </a:pPr>
+            <a:r>
+              <a:rPr sz="1200" b="0">
+                <a:solidFill>
+                  <a:srgbClr val="F8FAFC"/>
+                </a:solidFill>
+                <a:latin typeface="Courier New"/>
+              </a:rPr>
+              <a:t>reg = keras.Sequential([</a:t>
+            </a:r>
+          </a:p>
+          <a:p>
+            <a:pPr>
+              <a:defRPr sz="1200" b="0">
+                <a:solidFill>
+                  <a:srgbClr val="F8FAFC"/>
+                </a:solidFill>
+                <a:latin typeface="Courier New"/>
+              </a:defRPr>
+            </a:pPr>
+            <a:r>
+              <a:rPr sz="1200" b="0">
+                <a:solidFill>
+                  <a:srgbClr val="F8FAFC"/>
+                </a:solidFill>
+                <a:latin typeface="Courier New"/>
+              </a:rPr>
+              <a:t>    keras.Input(shape=(X.shape[1],)),</a:t>
+            </a:r>
+          </a:p>
+          <a:p>
+            <a:pPr>
+              <a:defRPr sz="1200" b="0">
+                <a:solidFill>
+                  <a:srgbClr val="F8FAFC"/>
+                </a:solidFill>
+                <a:latin typeface="Courier New"/>
+              </a:defRPr>
+            </a:pPr>
+            <a:r>
+              <a:rPr sz="1200" b="0">
+                <a:solidFill>
+                  <a:srgbClr val="F8FAFC"/>
+                </a:solidFill>
+                <a:latin typeface="Courier New"/>
+              </a:rPr>
+              <a:t>    norm,</a:t>
+            </a:r>
+          </a:p>
+          <a:p>
+            <a:pPr>
+              <a:defRPr sz="1200" b="0">
+                <a:solidFill>
+                  <a:srgbClr val="F8FAFC"/>
+                </a:solidFill>
+                <a:latin typeface="Courier New"/>
+              </a:defRPr>
+            </a:pPr>
+            <a:r>
+              <a:rPr sz="1200" b="0">
+                <a:solidFill>
+                  <a:srgbClr val="F8FAFC"/>
+                </a:solidFill>
+                <a:latin typeface="Courier New"/>
+              </a:rPr>
+              <a:t>    layers.Dense(64, activation="relu"),</a:t>
+            </a:r>
+          </a:p>
+          <a:p>
+            <a:pPr>
+              <a:defRPr sz="1200" b="0">
+                <a:solidFill>
+                  <a:srgbClr val="F8FAFC"/>
+                </a:solidFill>
+                <a:latin typeface="Courier New"/>
+              </a:defRPr>
+            </a:pPr>
+            <a:r>
+              <a:rPr sz="1200" b="0">
+                <a:solidFill>
+                  <a:srgbClr val="F8FAFC"/>
+                </a:solidFill>
+                <a:latin typeface="Courier New"/>
+              </a:rPr>
+              <a:t>    layers.Dense(32, activation="relu"),</a:t>
+            </a:r>
+          </a:p>
+          <a:p>
+            <a:pPr>
+              <a:defRPr sz="1200" b="0">
+                <a:solidFill>
+                  <a:srgbClr val="F8FAFC"/>
+                </a:solidFill>
+                <a:latin typeface="Courier New"/>
+              </a:defRPr>
+            </a:pPr>
+            <a:r>
+              <a:rPr sz="1200" b="0">
+                <a:solidFill>
+                  <a:srgbClr val="F8FAFC"/>
+                </a:solidFill>
+                <a:latin typeface="Courier New"/>
+              </a:rPr>
+              <a:t># ... (truncado)</a:t>
             </a:r>
           </a:p>
         </p:txBody>

--- a/docs/presentaciones/classes/clase-101-regresion-y-clasificacion-con-mlp-presentacion.pptx
+++ b/docs/presentaciones/classes/clase-101-regresion-y-clasificacion-con-mlp-presentacion.pptx
@@ -3272,7 +3272,7 @@
                 </a:solidFill>
                 <a:latin typeface="Segoe UI"/>
               </a:rPr>
-              <a:t>Parte: 2 — Deep Learning · Fuente: Géron, cap. 10 § Building an Image Classifier y § Building a Regression MLP.  Duración estimada: 75 min.</a:t>
+              <a:t>Parte: 2 — Deep Learning · Fuente: Géron, cap. 10 § Building an Image Classifier y § Building a Regression MLP.  Duración estimada: 75 min. · Nivel: Avanzado</a:t>
             </a:r>
           </a:p>
         </p:txBody>
@@ -3581,7 +3581,7 @@
                 </a:solidFill>
                 <a:latin typeface="Segoe UI"/>
               </a:rPr>
-              <a:t>Parte: 2 — Deep Learning · Fuente: Géron, cap. 10 § Building an Image Classifier y § Building a Regression MLP.  Duración estimada: 75 min.</a:t>
+              <a:t>Parte: 2 — Deep Learning · Fuente: Géron, cap. 10 § Building an Image Classifier y § Building a Regression MLP.  Duración estimada: 75 min. · Nivel: Avanzado</a:t>
             </a:r>
           </a:p>
         </p:txBody>
